--- a/20_Projects/企業のオンライン保健室/顧客/株式会社orb/02_報告会記録/20261014_奥田さん中間報告まとめ.pptx
+++ b/20_Projects/企業のオンライン保健室/顧客/株式会社orb/02_報告会記録/20261014_奥田さん中間報告まとめ.pptx
@@ -3832,8 +3832,7 @@
                 </a:solidFill>
                 <a:latin typeface="Meiryo UI"/>
               </a:rPr>
-              <a:t>ただしシフトは限界に近い
-（目安：あと1か月ほど）</a:t>
+              <a:t>ただしシフトは限界に近い</a:t>
             </a:r>
           </a:p>
         </p:txBody>
@@ -3950,7 +3949,7 @@
                 </a:solidFill>
                 <a:latin typeface="Meiryo UI"/>
               </a:rPr>
-              <a:t>過去の例から</a:t>
+              <a:t>今後の見通し（髙橋の感覚として）</a:t>
             </a:r>
           </a:p>
         </p:txBody>
@@ -3989,8 +3988,8 @@
                 </a:solidFill>
                 <a:latin typeface="Meiryo UI"/>
               </a:rPr>
-              <a:t>急いで戻すと再休職・退職になりやすい
-→ 焦らず進める</a:t>
+              <a:t>あと1か月ほど様子を見ないと、
+どう転ぶかまだ分からない段階です</a:t>
             </a:r>
           </a:p>
         </p:txBody>

--- a/20_Projects/企業のオンライン保健室/顧客/株式会社orb/02_報告会記録/20261014_奥田さん中間報告まとめ.pptx
+++ b/20_Projects/企業のオンライン保健室/顧客/株式会社orb/02_報告会記録/20261014_奥田さん中間報告まとめ.pptx
@@ -3767,7 +3767,7 @@
         </p:nvSpPr>
         <p:spPr>
           <a:xfrm>
-            <a:off x="4453128" y="3063239"/>
+            <a:off x="4453128" y="2898648"/>
             <a:ext cx="3291840" cy="320040"/>
           </a:xfrm>
           <a:prstGeom prst="rect">
@@ -3806,7 +3806,7 @@
         </p:nvSpPr>
         <p:spPr>
           <a:xfrm>
-            <a:off x="4453128" y="3364991"/>
+            <a:off x="4453128" y="3200400"/>
             <a:ext cx="3291840" cy="548640"/>
           </a:xfrm>
           <a:prstGeom prst="rect">
@@ -3845,7 +3845,7 @@
         </p:nvSpPr>
         <p:spPr>
           <a:xfrm>
-            <a:off x="4453128" y="3931920"/>
+            <a:off x="4453128" y="3602736"/>
             <a:ext cx="3291840" cy="320040"/>
           </a:xfrm>
           <a:prstGeom prst="rect">
@@ -3884,7 +3884,7 @@
         </p:nvSpPr>
         <p:spPr>
           <a:xfrm>
-            <a:off x="4453128" y="4233672"/>
+            <a:off x="4453128" y="3904487"/>
             <a:ext cx="3291840" cy="548640"/>
           </a:xfrm>
           <a:prstGeom prst="rect">
@@ -3923,7 +3923,7 @@
         </p:nvSpPr>
         <p:spPr>
           <a:xfrm>
-            <a:off x="4453128" y="4800600"/>
+            <a:off x="4453128" y="4306824"/>
             <a:ext cx="3291840" cy="320040"/>
           </a:xfrm>
           <a:prstGeom prst="rect">
@@ -3962,7 +3962,7 @@
         </p:nvSpPr>
         <p:spPr>
           <a:xfrm>
-            <a:off x="4453128" y="5102352"/>
+            <a:off x="4453128" y="4608576"/>
             <a:ext cx="3291840" cy="548640"/>
           </a:xfrm>
           <a:prstGeom prst="rect">
@@ -3988,8 +3988,9 @@
                 </a:solidFill>
                 <a:latin typeface="Meiryo UI"/>
               </a:rPr>
-              <a:t>あと1か月ほど様子を見ないと、
-どう転ぶかまだ分からない段階です</a:t>
+              <a:t>復帰の方向性が見えてくるまで、
+あと1か月ほどは様子を見る必要があると
+保健室としては判断しています</a:t>
             </a:r>
           </a:p>
         </p:txBody>
